--- a/trinket/Beginning-Python-Journey-Map.pptx
+++ b/trinket/Beginning-Python-Journey-Map.pptx
@@ -259,7 +259,7 @@
           <a:p>
             <a:fld id="{91094BAA-B974-B744-A3DE-1879E04FBB00}" type="datetimeFigureOut">
               <a:rPr lang="en-US" smtClean="0"/>
-              <a:t>7/18/20</a:t>
+              <a:t>2/20/25</a:t>
             </a:fld>
             <a:endParaRPr lang="en-US"/>
           </a:p>
@@ -457,7 +457,7 @@
           <a:p>
             <a:fld id="{91094BAA-B974-B744-A3DE-1879E04FBB00}" type="datetimeFigureOut">
               <a:rPr lang="en-US" smtClean="0"/>
-              <a:t>7/18/20</a:t>
+              <a:t>2/20/25</a:t>
             </a:fld>
             <a:endParaRPr lang="en-US"/>
           </a:p>
@@ -665,7 +665,7 @@
           <a:p>
             <a:fld id="{91094BAA-B974-B744-A3DE-1879E04FBB00}" type="datetimeFigureOut">
               <a:rPr lang="en-US" smtClean="0"/>
-              <a:t>7/18/20</a:t>
+              <a:t>2/20/25</a:t>
             </a:fld>
             <a:endParaRPr lang="en-US"/>
           </a:p>
@@ -863,7 +863,7 @@
           <a:p>
             <a:fld id="{91094BAA-B974-B744-A3DE-1879E04FBB00}" type="datetimeFigureOut">
               <a:rPr lang="en-US" smtClean="0"/>
-              <a:t>7/18/20</a:t>
+              <a:t>2/20/25</a:t>
             </a:fld>
             <a:endParaRPr lang="en-US"/>
           </a:p>
@@ -1138,7 +1138,7 @@
           <a:p>
             <a:fld id="{91094BAA-B974-B744-A3DE-1879E04FBB00}" type="datetimeFigureOut">
               <a:rPr lang="en-US" smtClean="0"/>
-              <a:t>7/18/20</a:t>
+              <a:t>2/20/25</a:t>
             </a:fld>
             <a:endParaRPr lang="en-US"/>
           </a:p>
@@ -1403,7 +1403,7 @@
           <a:p>
             <a:fld id="{91094BAA-B974-B744-A3DE-1879E04FBB00}" type="datetimeFigureOut">
               <a:rPr lang="en-US" smtClean="0"/>
-              <a:t>7/18/20</a:t>
+              <a:t>2/20/25</a:t>
             </a:fld>
             <a:endParaRPr lang="en-US"/>
           </a:p>
@@ -1815,7 +1815,7 @@
           <a:p>
             <a:fld id="{91094BAA-B974-B744-A3DE-1879E04FBB00}" type="datetimeFigureOut">
               <a:rPr lang="en-US" smtClean="0"/>
-              <a:t>7/18/20</a:t>
+              <a:t>2/20/25</a:t>
             </a:fld>
             <a:endParaRPr lang="en-US"/>
           </a:p>
@@ -1956,7 +1956,7 @@
           <a:p>
             <a:fld id="{91094BAA-B974-B744-A3DE-1879E04FBB00}" type="datetimeFigureOut">
               <a:rPr lang="en-US" smtClean="0"/>
-              <a:t>7/18/20</a:t>
+              <a:t>2/20/25</a:t>
             </a:fld>
             <a:endParaRPr lang="en-US"/>
           </a:p>
@@ -2069,7 +2069,7 @@
           <a:p>
             <a:fld id="{91094BAA-B974-B744-A3DE-1879E04FBB00}" type="datetimeFigureOut">
               <a:rPr lang="en-US" smtClean="0"/>
-              <a:t>7/18/20</a:t>
+              <a:t>2/20/25</a:t>
             </a:fld>
             <a:endParaRPr lang="en-US"/>
           </a:p>
@@ -2380,7 +2380,7 @@
           <a:p>
             <a:fld id="{91094BAA-B974-B744-A3DE-1879E04FBB00}" type="datetimeFigureOut">
               <a:rPr lang="en-US" smtClean="0"/>
-              <a:t>7/18/20</a:t>
+              <a:t>2/20/25</a:t>
             </a:fld>
             <a:endParaRPr lang="en-US"/>
           </a:p>
@@ -2668,7 +2668,7 @@
           <a:p>
             <a:fld id="{91094BAA-B974-B744-A3DE-1879E04FBB00}" type="datetimeFigureOut">
               <a:rPr lang="en-US" smtClean="0"/>
-              <a:t>7/18/20</a:t>
+              <a:t>2/20/25</a:t>
             </a:fld>
             <a:endParaRPr lang="en-US"/>
           </a:p>
@@ -2909,7 +2909,7 @@
           <a:p>
             <a:fld id="{91094BAA-B974-B744-A3DE-1879E04FBB00}" type="datetimeFigureOut">
               <a:rPr lang="en-US" smtClean="0"/>
-              <a:t>7/18/20</a:t>
+              <a:t>2/20/25</a:t>
             </a:fld>
             <a:endParaRPr lang="en-US"/>
           </a:p>
@@ -3864,87 +3864,6 @@
       </p:sp>
       <p:sp>
         <p:nvSpPr>
-          <p:cNvPr id="2" name="Title 1">
-            <a:extLst>
-              <a:ext uri="{FF2B5EF4-FFF2-40B4-BE49-F238E27FC236}">
-                <a16:creationId xmlns:a16="http://schemas.microsoft.com/office/drawing/2014/main" id="{3469ED23-F774-D443-B3DA-80032440FB5C}"/>
-              </a:ext>
-            </a:extLst>
-          </p:cNvPr>
-          <p:cNvSpPr>
-            <a:spLocks noGrp="1"/>
-          </p:cNvSpPr>
-          <p:nvPr>
-            <p:ph type="ctrTitle"/>
-          </p:nvPr>
-        </p:nvSpPr>
-        <p:spPr>
-          <a:xfrm>
-            <a:off x="108422" y="34046"/>
-            <a:ext cx="9924381" cy="338555"/>
-          </a:xfrm>
-        </p:spPr>
-        <p:txBody>
-          <a:bodyPr>
-            <a:normAutofit/>
-          </a:bodyPr>
-          <a:lstStyle/>
-          <a:p>
-            <a:pPr algn="l"/>
-            <a:r>
-              <a:rPr lang="en-US" sz="1600" b="1" dirty="0">
-                <a:latin typeface="Arial" panose="020B0604020202020204" pitchFamily="34" charset="0"/>
-                <a:cs typeface="Arial" panose="020B0604020202020204" pitchFamily="34" charset="0"/>
-              </a:rPr>
-              <a:t>Journey Map for Beginning Python</a:t>
-            </a:r>
-          </a:p>
-        </p:txBody>
-      </p:sp>
-      <p:sp>
-        <p:nvSpPr>
-          <p:cNvPr id="3" name="Subtitle 2">
-            <a:extLst>
-              <a:ext uri="{FF2B5EF4-FFF2-40B4-BE49-F238E27FC236}">
-                <a16:creationId xmlns:a16="http://schemas.microsoft.com/office/drawing/2014/main" id="{D884752E-4BDF-C349-96BC-3113DB083F22}"/>
-              </a:ext>
-            </a:extLst>
-          </p:cNvPr>
-          <p:cNvSpPr>
-            <a:spLocks noGrp="1"/>
-          </p:cNvSpPr>
-          <p:nvPr>
-            <p:ph type="subTitle" idx="1"/>
-          </p:nvPr>
-        </p:nvSpPr>
-        <p:spPr>
-          <a:xfrm>
-            <a:off x="4490299" y="6456921"/>
-            <a:ext cx="3374571" cy="424543"/>
-          </a:xfrm>
-        </p:spPr>
-        <p:txBody>
-          <a:bodyPr>
-            <a:noAutofit/>
-          </a:bodyPr>
-          <a:lstStyle/>
-          <a:p>
-            <a:r>
-              <a:rPr lang="en-US" sz="1600" dirty="0">
-                <a:solidFill>
-                  <a:schemeClr val="tx1">
-                    <a:lumMod val="50000"/>
-                    <a:lumOff val="50000"/>
-                  </a:schemeClr>
-                </a:solidFill>
-              </a:rPr>
-              <a:t>Feedback: Dan.McCreary@gmail.com</a:t>
-            </a:r>
-          </a:p>
-        </p:txBody>
-      </p:sp>
-      <p:sp>
-        <p:nvSpPr>
           <p:cNvPr id="4" name="Freeform 3">
             <a:extLst>
               <a:ext uri="{FF2B5EF4-FFF2-40B4-BE49-F238E27FC236}">
@@ -4506,35 +4425,6 @@
       </p:sp>
       <p:pic>
         <p:nvPicPr>
-          <p:cNvPr id="9" name="Picture 8">
-            <a:extLst>
-              <a:ext uri="{FF2B5EF4-FFF2-40B4-BE49-F238E27FC236}">
-                <a16:creationId xmlns:a16="http://schemas.microsoft.com/office/drawing/2014/main" id="{E51FDDA3-BD6D-134B-BD06-EB00D388200E}"/>
-              </a:ext>
-            </a:extLst>
-          </p:cNvPr>
-          <p:cNvPicPr>
-            <a:picLocks noChangeAspect="1"/>
-          </p:cNvPicPr>
-          <p:nvPr/>
-        </p:nvPicPr>
-        <p:blipFill rotWithShape="1">
-          <a:blip r:embed="rId4"/>
-          <a:srcRect t="2659"/>
-          <a:stretch/>
-        </p:blipFill>
-        <p:spPr>
-          <a:xfrm>
-            <a:off x="191410" y="6193640"/>
-            <a:ext cx="1761216" cy="509971"/>
-          </a:xfrm>
-          <a:prstGeom prst="rect">
-            <a:avLst/>
-          </a:prstGeom>
-        </p:spPr>
-      </p:pic>
-      <p:pic>
-        <p:nvPicPr>
           <p:cNvPr id="10" name="Picture 9">
             <a:extLst>
               <a:ext uri="{FF2B5EF4-FFF2-40B4-BE49-F238E27FC236}">
@@ -4548,7 +4438,7 @@
           <p:nvPr/>
         </p:nvPicPr>
         <p:blipFill>
-          <a:blip r:embed="rId5"/>
+          <a:blip r:embed="rId4"/>
           <a:stretch>
             <a:fillRect/>
           </a:stretch>
@@ -5924,7 +5814,7 @@
           <p:nvPr/>
         </p:nvPicPr>
         <p:blipFill>
-          <a:blip r:embed="rId6"/>
+          <a:blip r:embed="rId5"/>
           <a:stretch>
             <a:fillRect/>
           </a:stretch>
@@ -5954,7 +5844,7 @@
           <p:nvPr/>
         </p:nvPicPr>
         <p:blipFill>
-          <a:blip r:embed="rId7"/>
+          <a:blip r:embed="rId6"/>
           <a:stretch>
             <a:fillRect/>
           </a:stretch>
@@ -5991,7 +5881,7 @@
           <p:nvPr/>
         </p:nvPicPr>
         <p:blipFill>
-          <a:blip r:embed="rId8"/>
+          <a:blip r:embed="rId7"/>
           <a:stretch>
             <a:fillRect/>
           </a:stretch>
@@ -7007,7 +6897,7 @@
           <p:nvPr/>
         </p:nvPicPr>
         <p:blipFill>
-          <a:blip r:embed="rId9"/>
+          <a:blip r:embed="rId8"/>
           <a:stretch>
             <a:fillRect/>
           </a:stretch>
@@ -11111,7 +11001,7 @@
           <p:nvPr/>
         </p:nvPicPr>
         <p:blipFill>
-          <a:blip r:embed="rId10"/>
+          <a:blip r:embed="rId9"/>
           <a:stretch>
             <a:fillRect/>
           </a:stretch>
